--- a/диплом2.pptx
+++ b/диплом2.pptx
@@ -25,8 +25,8 @@
     <p:sldId id="267" r:id="rId16"/>
     <p:sldId id="269" r:id="rId17"/>
     <p:sldId id="270" r:id="rId18"/>
-    <p:sldId id="271" r:id="rId19"/>
-    <p:sldId id="272" r:id="rId20"/>
+    <p:sldId id="272" r:id="rId19"/>
+    <p:sldId id="271" r:id="rId20"/>
     <p:sldId id="273" r:id="rId21"/>
     <p:sldId id="274" r:id="rId22"/>
     <p:sldId id="280" r:id="rId23"/>
@@ -2579,7 +2579,7 @@
                 <a:uFillTx/>
                 <a:latin typeface="Segoe UI"/>
               </a:rPr>
-              <a:t>4</a:t>
+              <a:t>3</a:t>
             </a:r>
             <a:endParaRPr lang="ru-RU" sz="1800" b="0" u="none" strike="noStrike" dirty="0">
               <a:solidFill>
@@ -2818,7 +2818,7 @@
                 <a:uFillTx/>
                 <a:latin typeface="Segoe UI"/>
               </a:rPr>
-              <a:t>4</a:t>
+              <a:t>3</a:t>
             </a:r>
             <a:endParaRPr lang="ru-RU" sz="1800" b="0" u="none" strike="noStrike" dirty="0">
               <a:solidFill>
@@ -3239,7 +3239,7 @@
                 <a:uFillTx/>
                 <a:latin typeface="Segoe UI"/>
               </a:rPr>
-              <a:t>4</a:t>
+              <a:t>3</a:t>
             </a:r>
             <a:endParaRPr lang="ru-RU" sz="1800" b="0" u="none" strike="noStrike" dirty="0">
               <a:solidFill>
@@ -3654,7 +3654,7 @@
                 <a:uFillTx/>
                 <a:latin typeface="Segoe UI"/>
               </a:rPr>
-              <a:t>4</a:t>
+              <a:t>3</a:t>
             </a:r>
             <a:endParaRPr lang="ru-RU" sz="1800" b="0" u="none" strike="noStrike" dirty="0">
               <a:solidFill>
@@ -4077,7 +4077,7 @@
                 <a:uFillTx/>
                 <a:latin typeface="Segoe UI"/>
               </a:rPr>
-              <a:t>4</a:t>
+              <a:t>3</a:t>
             </a:r>
             <a:endParaRPr lang="ru-RU" sz="1800" b="0" u="none" strike="noStrike" dirty="0">
               <a:solidFill>
@@ -4526,7 +4526,7 @@
                 <a:uFillTx/>
                 <a:latin typeface="Segoe UI"/>
               </a:rPr>
-              <a:t>4</a:t>
+              <a:t>3</a:t>
             </a:r>
             <a:endParaRPr lang="ru-RU" sz="1800" b="0" u="none" strike="noStrike" dirty="0">
               <a:solidFill>
@@ -4856,7 +4856,7 @@
                 <a:uFillTx/>
                 <a:latin typeface="Segoe UI"/>
               </a:rPr>
-              <a:t>4</a:t>
+              <a:t>3</a:t>
             </a:r>
             <a:endParaRPr lang="ru-RU" sz="1800" b="0" u="none" strike="noStrike" dirty="0">
               <a:solidFill>
@@ -5115,7 +5115,7 @@
                 <a:uFillTx/>
                 <a:latin typeface="Segoe UI"/>
               </a:rPr>
-              <a:t>4</a:t>
+              <a:t>3</a:t>
             </a:r>
             <a:endParaRPr lang="ru-RU" sz="1800" b="0" u="none" strike="noStrike" dirty="0">
               <a:solidFill>
@@ -5280,6 +5280,317 @@
 </file>
 
 <file path=ppt/slides/slide18.xml><?xml version="1.0" encoding="utf-8"?>
+<p:sld xmlns:a="http://schemas.openxmlformats.org/drawingml/2006/main" xmlns:r="http://schemas.openxmlformats.org/officeDocument/2006/relationships" xmlns:p="http://schemas.openxmlformats.org/presentationml/2006/main">
+  <p:cSld>
+    <p:bg>
+      <p:bgPr>
+        <a:solidFill>
+          <a:schemeClr val="lt1"/>
+        </a:solidFill>
+        <a:effectLst/>
+      </p:bgPr>
+    </p:bg>
+    <p:spTree>
+      <p:nvGrpSpPr>
+        <p:cNvPr id="1" name=""/>
+        <p:cNvGrpSpPr/>
+        <p:nvPr/>
+      </p:nvGrpSpPr>
+      <p:grpSpPr>
+        <a:xfrm>
+          <a:off x="0" y="0"/>
+          <a:ext cx="0" cy="0"/>
+          <a:chOff x="0" y="0"/>
+          <a:chExt cx="0" cy="0"/>
+        </a:xfrm>
+      </p:grpSpPr>
+      <p:sp>
+        <p:nvSpPr>
+          <p:cNvPr id="115" name="Rectangle 1"/>
+          <p:cNvSpPr/>
+          <p:nvPr/>
+        </p:nvSpPr>
+        <p:spPr>
+          <a:xfrm>
+            <a:off x="0" y="0"/>
+            <a:ext cx="12191400" cy="1005480"/>
+          </a:xfrm>
+          <a:prstGeom prst="rect">
+            <a:avLst/>
+          </a:prstGeom>
+          <a:solidFill>
+            <a:schemeClr val="accent5">
+              <a:lumMod val="75000"/>
+            </a:schemeClr>
+          </a:solidFill>
+          <a:ln>
+            <a:noFill/>
+          </a:ln>
+        </p:spPr>
+        <p:style>
+          <a:lnRef idx="1">
+            <a:schemeClr val="accent1"/>
+          </a:lnRef>
+          <a:fillRef idx="3">
+            <a:schemeClr val="accent1"/>
+          </a:fillRef>
+          <a:effectRef idx="2">
+            <a:schemeClr val="accent1"/>
+          </a:effectRef>
+          <a:fontRef idx="minor"/>
+        </p:style>
+        <p:txBody>
+          <a:bodyPr lIns="90000" tIns="45000" rIns="90000" bIns="45000" anchor="ctr">
+            <a:noAutofit/>
+          </a:bodyPr>
+          <a:lstStyle/>
+          <a:p>
+            <a:pPr algn="ctr" defTabSz="914400">
+              <a:lnSpc>
+                <a:spcPct val="100000"/>
+              </a:lnSpc>
+            </a:pPr>
+            <a:endParaRPr lang="ru-RU" sz="1800" b="0" u="none" strike="noStrike">
+              <a:solidFill>
+                <a:schemeClr val="lt1"/>
+              </a:solidFill>
+              <a:effectLst/>
+              <a:uFillTx/>
+              <a:latin typeface="Noto Sans"/>
+            </a:endParaRPr>
+          </a:p>
+        </p:txBody>
+      </p:sp>
+      <p:sp>
+        <p:nvSpPr>
+          <p:cNvPr id="117" name="Прямоугольник 6"/>
+          <p:cNvSpPr/>
+          <p:nvPr/>
+        </p:nvSpPr>
+        <p:spPr>
+          <a:xfrm>
+            <a:off x="10841040" y="6054480"/>
+            <a:ext cx="816547" cy="367878"/>
+          </a:xfrm>
+          <a:prstGeom prst="rect">
+            <a:avLst/>
+          </a:prstGeom>
+          <a:noFill/>
+          <a:ln w="0">
+            <a:noFill/>
+          </a:ln>
+        </p:spPr>
+        <p:style>
+          <a:lnRef idx="0">
+            <a:scrgbClr r="0" g="0" b="0"/>
+          </a:lnRef>
+          <a:fillRef idx="0">
+            <a:scrgbClr r="0" g="0" b="0"/>
+          </a:fillRef>
+          <a:effectRef idx="0">
+            <a:scrgbClr r="0" g="0" b="0"/>
+          </a:effectRef>
+          <a:fontRef idx="minor"/>
+        </p:style>
+        <p:txBody>
+          <a:bodyPr wrap="none" lIns="90000" tIns="45000" rIns="90000" bIns="45000" anchor="t">
+            <a:spAutoFit/>
+          </a:bodyPr>
+          <a:lstStyle/>
+          <a:p>
+            <a:pPr defTabSz="914400">
+              <a:lnSpc>
+                <a:spcPct val="100000"/>
+              </a:lnSpc>
+            </a:pPr>
+            <a:fld id="{EB4ED2AC-C880-4165-B4A8-50EE7B2624ED}" type="slidenum">
+              <a:rPr lang="en-US" sz="1800" b="1" u="none" strike="noStrike" smtClean="0">
+                <a:solidFill>
+                  <a:schemeClr val="dk1"/>
+                </a:solidFill>
+                <a:effectLst/>
+                <a:uFillTx/>
+                <a:latin typeface="Segoe UI"/>
+              </a:rPr>
+              <a:t>18</a:t>
+            </a:fld>
+            <a:r>
+              <a:rPr lang="en-US" sz="1800" b="1" u="none" strike="noStrike" dirty="0">
+                <a:solidFill>
+                  <a:schemeClr val="dk1"/>
+                </a:solidFill>
+                <a:effectLst/>
+                <a:uFillTx/>
+                <a:latin typeface="Segoe UI"/>
+              </a:rPr>
+              <a:t>/2</a:t>
+            </a:r>
+            <a:r>
+              <a:rPr lang="ru-RU" sz="1800" b="1" u="none" strike="noStrike" dirty="0">
+                <a:solidFill>
+                  <a:schemeClr val="dk1"/>
+                </a:solidFill>
+                <a:effectLst/>
+                <a:uFillTx/>
+                <a:latin typeface="Segoe UI"/>
+              </a:rPr>
+              <a:t>3</a:t>
+            </a:r>
+            <a:endParaRPr lang="ru-RU" sz="1800" b="0" u="none" strike="noStrike" dirty="0">
+              <a:solidFill>
+                <a:srgbClr val="000000"/>
+              </a:solidFill>
+              <a:effectLst/>
+              <a:uFillTx/>
+              <a:latin typeface="Arial"/>
+            </a:endParaRPr>
+          </a:p>
+        </p:txBody>
+      </p:sp>
+      <p:pic>
+        <p:nvPicPr>
+          <p:cNvPr id="118" name="Рисунок 5"/>
+          <p:cNvPicPr/>
+          <p:nvPr/>
+        </p:nvPicPr>
+        <p:blipFill>
+          <a:blip r:embed="rId2"/>
+          <a:srcRect l="14435" r="15008" b="39580"/>
+          <a:stretch/>
+        </p:blipFill>
+        <p:spPr>
+          <a:xfrm>
+            <a:off x="276480" y="2059920"/>
+            <a:ext cx="9447480" cy="4550040"/>
+          </a:xfrm>
+          <a:prstGeom prst="rect">
+            <a:avLst/>
+          </a:prstGeom>
+          <a:noFill/>
+          <a:ln w="12700">
+            <a:solidFill>
+              <a:schemeClr val="accent1"/>
+            </a:solidFill>
+          </a:ln>
+        </p:spPr>
+      </p:pic>
+      <p:sp>
+        <p:nvSpPr>
+          <p:cNvPr id="119" name="TextBox 118"/>
+          <p:cNvSpPr txBox="1"/>
+          <p:nvPr/>
+        </p:nvSpPr>
+        <p:spPr>
+          <a:xfrm>
+            <a:off x="2955108" y="1154160"/>
+            <a:ext cx="6281184" cy="460211"/>
+          </a:xfrm>
+          <a:prstGeom prst="rect">
+            <a:avLst/>
+          </a:prstGeom>
+          <a:noFill/>
+          <a:ln w="0">
+            <a:noFill/>
+          </a:ln>
+        </p:spPr>
+        <p:txBody>
+          <a:bodyPr wrap="none" lIns="90000" tIns="45000" rIns="90000" bIns="45000" anchor="t">
+            <a:spAutoFit/>
+          </a:bodyPr>
+          <a:lstStyle/>
+          <a:p>
+            <a:pPr algn="ctr"/>
+            <a:r>
+              <a:rPr lang="ru-RU" sz="2400" u="none" strike="noStrike" dirty="0">
+                <a:solidFill>
+                  <a:srgbClr val="000000"/>
+                </a:solidFill>
+                <a:effectLst/>
+                <a:uFillTx/>
+                <a:latin typeface="Noto Sans"/>
+              </a:rPr>
+              <a:t>Выбор нескольких физических величин</a:t>
+            </a:r>
+          </a:p>
+        </p:txBody>
+      </p:sp>
+      <p:sp>
+        <p:nvSpPr>
+          <p:cNvPr id="7" name="TextBox 2">
+            <a:extLst>
+              <a:ext uri="{FF2B5EF4-FFF2-40B4-BE49-F238E27FC236}">
+                <a16:creationId xmlns:a16="http://schemas.microsoft.com/office/drawing/2014/main" id="{61D4F05F-CDAA-4964-B096-96D46DE0682B}"/>
+              </a:ext>
+            </a:extLst>
+          </p:cNvPr>
+          <p:cNvSpPr/>
+          <p:nvPr/>
+        </p:nvSpPr>
+        <p:spPr>
+          <a:xfrm>
+            <a:off x="1692360" y="151034"/>
+            <a:ext cx="8806680" cy="708120"/>
+          </a:xfrm>
+          <a:prstGeom prst="rect">
+            <a:avLst/>
+          </a:prstGeom>
+          <a:noFill/>
+          <a:ln w="0">
+            <a:noFill/>
+          </a:ln>
+        </p:spPr>
+        <p:style>
+          <a:lnRef idx="0">
+            <a:scrgbClr r="0" g="0" b="0"/>
+          </a:lnRef>
+          <a:fillRef idx="0">
+            <a:scrgbClr r="0" g="0" b="0"/>
+          </a:fillRef>
+          <a:effectRef idx="0">
+            <a:scrgbClr r="0" g="0" b="0"/>
+          </a:effectRef>
+          <a:fontRef idx="minor"/>
+        </p:style>
+        <p:txBody>
+          <a:bodyPr lIns="90000" tIns="45000" rIns="90000" bIns="45000" anchor="t">
+            <a:spAutoFit/>
+          </a:bodyPr>
+          <a:lstStyle/>
+          <a:p>
+            <a:pPr algn="ctr" defTabSz="914400">
+              <a:lnSpc>
+                <a:spcPct val="100000"/>
+              </a:lnSpc>
+            </a:pPr>
+            <a:r>
+              <a:rPr lang="ru-RU" sz="4000" b="1" dirty="0">
+                <a:solidFill>
+                  <a:srgbClr val="FFFFFF"/>
+                </a:solidFill>
+                <a:latin typeface="Noto Sans"/>
+              </a:rPr>
+              <a:t>Демонстрация функционала</a:t>
+            </a:r>
+            <a:endParaRPr lang="ru-RU" sz="4000" b="0" u="none" strike="noStrike" dirty="0">
+              <a:solidFill>
+                <a:srgbClr val="000000"/>
+              </a:solidFill>
+              <a:effectLst/>
+              <a:uFillTx/>
+              <a:latin typeface="Arial"/>
+            </a:endParaRPr>
+          </a:p>
+        </p:txBody>
+      </p:sp>
+    </p:spTree>
+  </p:cSld>
+  <p:clrMapOvr>
+    <a:masterClrMapping/>
+  </p:clrMapOvr>
+</p:sld>
+</file>
+
+<file path=ppt/slides/slide19.xml><?xml version="1.0" encoding="utf-8"?>
 <p:sld xmlns:a="http://schemas.openxmlformats.org/drawingml/2006/main" xmlns:r="http://schemas.openxmlformats.org/officeDocument/2006/relationships" xmlns:p="http://schemas.openxmlformats.org/presentationml/2006/main">
   <p:cSld>
     <p:bg>
@@ -5412,7 +5723,7 @@
                 <a:uFillTx/>
                 <a:latin typeface="Segoe UI"/>
               </a:rPr>
-              <a:t>18</a:t>
+              <a:t>19</a:t>
             </a:fld>
             <a:r>
               <a:rPr lang="en-US" sz="1800" b="1" u="none" strike="noStrike" dirty="0">
@@ -5434,7 +5745,7 @@
                 <a:uFillTx/>
                 <a:latin typeface="Segoe UI"/>
               </a:rPr>
-              <a:t>4</a:t>
+              <a:t>3</a:t>
             </a:r>
             <a:endParaRPr lang="ru-RU" sz="1800" b="0" u="none" strike="noStrike" dirty="0">
               <a:solidFill>
@@ -5528,317 +5839,6 @@
             <a:extLst>
               <a:ext uri="{FF2B5EF4-FFF2-40B4-BE49-F238E27FC236}">
                 <a16:creationId xmlns:a16="http://schemas.microsoft.com/office/drawing/2014/main" id="{26786CA2-CAAF-439A-9E9B-343489101A9A}"/>
-              </a:ext>
-            </a:extLst>
-          </p:cNvPr>
-          <p:cNvSpPr/>
-          <p:nvPr/>
-        </p:nvSpPr>
-        <p:spPr>
-          <a:xfrm>
-            <a:off x="1692360" y="151034"/>
-            <a:ext cx="8806680" cy="708120"/>
-          </a:xfrm>
-          <a:prstGeom prst="rect">
-            <a:avLst/>
-          </a:prstGeom>
-          <a:noFill/>
-          <a:ln w="0">
-            <a:noFill/>
-          </a:ln>
-        </p:spPr>
-        <p:style>
-          <a:lnRef idx="0">
-            <a:scrgbClr r="0" g="0" b="0"/>
-          </a:lnRef>
-          <a:fillRef idx="0">
-            <a:scrgbClr r="0" g="0" b="0"/>
-          </a:fillRef>
-          <a:effectRef idx="0">
-            <a:scrgbClr r="0" g="0" b="0"/>
-          </a:effectRef>
-          <a:fontRef idx="minor"/>
-        </p:style>
-        <p:txBody>
-          <a:bodyPr lIns="90000" tIns="45000" rIns="90000" bIns="45000" anchor="t">
-            <a:spAutoFit/>
-          </a:bodyPr>
-          <a:lstStyle/>
-          <a:p>
-            <a:pPr algn="ctr" defTabSz="914400">
-              <a:lnSpc>
-                <a:spcPct val="100000"/>
-              </a:lnSpc>
-            </a:pPr>
-            <a:r>
-              <a:rPr lang="ru-RU" sz="4000" b="1" dirty="0">
-                <a:solidFill>
-                  <a:srgbClr val="FFFFFF"/>
-                </a:solidFill>
-                <a:latin typeface="Noto Sans"/>
-              </a:rPr>
-              <a:t>Демонстрация функционала</a:t>
-            </a:r>
-            <a:endParaRPr lang="ru-RU" sz="4000" b="0" u="none" strike="noStrike" dirty="0">
-              <a:solidFill>
-                <a:srgbClr val="000000"/>
-              </a:solidFill>
-              <a:effectLst/>
-              <a:uFillTx/>
-              <a:latin typeface="Arial"/>
-            </a:endParaRPr>
-          </a:p>
-        </p:txBody>
-      </p:sp>
-    </p:spTree>
-  </p:cSld>
-  <p:clrMapOvr>
-    <a:masterClrMapping/>
-  </p:clrMapOvr>
-</p:sld>
-</file>
-
-<file path=ppt/slides/slide19.xml><?xml version="1.0" encoding="utf-8"?>
-<p:sld xmlns:a="http://schemas.openxmlformats.org/drawingml/2006/main" xmlns:r="http://schemas.openxmlformats.org/officeDocument/2006/relationships" xmlns:p="http://schemas.openxmlformats.org/presentationml/2006/main">
-  <p:cSld>
-    <p:bg>
-      <p:bgPr>
-        <a:solidFill>
-          <a:schemeClr val="lt1"/>
-        </a:solidFill>
-        <a:effectLst/>
-      </p:bgPr>
-    </p:bg>
-    <p:spTree>
-      <p:nvGrpSpPr>
-        <p:cNvPr id="1" name=""/>
-        <p:cNvGrpSpPr/>
-        <p:nvPr/>
-      </p:nvGrpSpPr>
-      <p:grpSpPr>
-        <a:xfrm>
-          <a:off x="0" y="0"/>
-          <a:ext cx="0" cy="0"/>
-          <a:chOff x="0" y="0"/>
-          <a:chExt cx="0" cy="0"/>
-        </a:xfrm>
-      </p:grpSpPr>
-      <p:sp>
-        <p:nvSpPr>
-          <p:cNvPr id="115" name="Rectangle 1"/>
-          <p:cNvSpPr/>
-          <p:nvPr/>
-        </p:nvSpPr>
-        <p:spPr>
-          <a:xfrm>
-            <a:off x="0" y="0"/>
-            <a:ext cx="12191400" cy="1005480"/>
-          </a:xfrm>
-          <a:prstGeom prst="rect">
-            <a:avLst/>
-          </a:prstGeom>
-          <a:solidFill>
-            <a:schemeClr val="accent5">
-              <a:lumMod val="75000"/>
-            </a:schemeClr>
-          </a:solidFill>
-          <a:ln>
-            <a:noFill/>
-          </a:ln>
-        </p:spPr>
-        <p:style>
-          <a:lnRef idx="1">
-            <a:schemeClr val="accent1"/>
-          </a:lnRef>
-          <a:fillRef idx="3">
-            <a:schemeClr val="accent1"/>
-          </a:fillRef>
-          <a:effectRef idx="2">
-            <a:schemeClr val="accent1"/>
-          </a:effectRef>
-          <a:fontRef idx="minor"/>
-        </p:style>
-        <p:txBody>
-          <a:bodyPr lIns="90000" tIns="45000" rIns="90000" bIns="45000" anchor="ctr">
-            <a:noAutofit/>
-          </a:bodyPr>
-          <a:lstStyle/>
-          <a:p>
-            <a:pPr algn="ctr" defTabSz="914400">
-              <a:lnSpc>
-                <a:spcPct val="100000"/>
-              </a:lnSpc>
-            </a:pPr>
-            <a:endParaRPr lang="ru-RU" sz="1800" b="0" u="none" strike="noStrike">
-              <a:solidFill>
-                <a:schemeClr val="lt1"/>
-              </a:solidFill>
-              <a:effectLst/>
-              <a:uFillTx/>
-              <a:latin typeface="Noto Sans"/>
-            </a:endParaRPr>
-          </a:p>
-        </p:txBody>
-      </p:sp>
-      <p:sp>
-        <p:nvSpPr>
-          <p:cNvPr id="117" name="Прямоугольник 6"/>
-          <p:cNvSpPr/>
-          <p:nvPr/>
-        </p:nvSpPr>
-        <p:spPr>
-          <a:xfrm>
-            <a:off x="10841040" y="6054480"/>
-            <a:ext cx="816547" cy="367878"/>
-          </a:xfrm>
-          <a:prstGeom prst="rect">
-            <a:avLst/>
-          </a:prstGeom>
-          <a:noFill/>
-          <a:ln w="0">
-            <a:noFill/>
-          </a:ln>
-        </p:spPr>
-        <p:style>
-          <a:lnRef idx="0">
-            <a:scrgbClr r="0" g="0" b="0"/>
-          </a:lnRef>
-          <a:fillRef idx="0">
-            <a:scrgbClr r="0" g="0" b="0"/>
-          </a:fillRef>
-          <a:effectRef idx="0">
-            <a:scrgbClr r="0" g="0" b="0"/>
-          </a:effectRef>
-          <a:fontRef idx="minor"/>
-        </p:style>
-        <p:txBody>
-          <a:bodyPr wrap="none" lIns="90000" tIns="45000" rIns="90000" bIns="45000" anchor="t">
-            <a:spAutoFit/>
-          </a:bodyPr>
-          <a:lstStyle/>
-          <a:p>
-            <a:pPr defTabSz="914400">
-              <a:lnSpc>
-                <a:spcPct val="100000"/>
-              </a:lnSpc>
-            </a:pPr>
-            <a:fld id="{EB4ED2AC-C880-4165-B4A8-50EE7B2624ED}" type="slidenum">
-              <a:rPr lang="en-US" sz="1800" b="1" u="none" strike="noStrike" smtClean="0">
-                <a:solidFill>
-                  <a:schemeClr val="dk1"/>
-                </a:solidFill>
-                <a:effectLst/>
-                <a:uFillTx/>
-                <a:latin typeface="Segoe UI"/>
-              </a:rPr>
-              <a:t>19</a:t>
-            </a:fld>
-            <a:r>
-              <a:rPr lang="en-US" sz="1800" b="1" u="none" strike="noStrike" dirty="0">
-                <a:solidFill>
-                  <a:schemeClr val="dk1"/>
-                </a:solidFill>
-                <a:effectLst/>
-                <a:uFillTx/>
-                <a:latin typeface="Segoe UI"/>
-              </a:rPr>
-              <a:t>/2</a:t>
-            </a:r>
-            <a:r>
-              <a:rPr lang="ru-RU" sz="1800" b="1" u="none" strike="noStrike" dirty="0">
-                <a:solidFill>
-                  <a:schemeClr val="dk1"/>
-                </a:solidFill>
-                <a:effectLst/>
-                <a:uFillTx/>
-                <a:latin typeface="Segoe UI"/>
-              </a:rPr>
-              <a:t>4</a:t>
-            </a:r>
-            <a:endParaRPr lang="ru-RU" sz="1800" b="0" u="none" strike="noStrike" dirty="0">
-              <a:solidFill>
-                <a:srgbClr val="000000"/>
-              </a:solidFill>
-              <a:effectLst/>
-              <a:uFillTx/>
-              <a:latin typeface="Arial"/>
-            </a:endParaRPr>
-          </a:p>
-        </p:txBody>
-      </p:sp>
-      <p:pic>
-        <p:nvPicPr>
-          <p:cNvPr id="118" name="Рисунок 5"/>
-          <p:cNvPicPr/>
-          <p:nvPr/>
-        </p:nvPicPr>
-        <p:blipFill>
-          <a:blip r:embed="rId2"/>
-          <a:srcRect l="14435" r="15008" b="39580"/>
-          <a:stretch/>
-        </p:blipFill>
-        <p:spPr>
-          <a:xfrm>
-            <a:off x="276480" y="2059920"/>
-            <a:ext cx="9447480" cy="4550040"/>
-          </a:xfrm>
-          <a:prstGeom prst="rect">
-            <a:avLst/>
-          </a:prstGeom>
-          <a:noFill/>
-          <a:ln w="12700">
-            <a:solidFill>
-              <a:schemeClr val="accent1"/>
-            </a:solidFill>
-          </a:ln>
-        </p:spPr>
-      </p:pic>
-      <p:sp>
-        <p:nvSpPr>
-          <p:cNvPr id="119" name="TextBox 118"/>
-          <p:cNvSpPr txBox="1"/>
-          <p:nvPr/>
-        </p:nvSpPr>
-        <p:spPr>
-          <a:xfrm>
-            <a:off x="2955108" y="1154160"/>
-            <a:ext cx="6281184" cy="460211"/>
-          </a:xfrm>
-          <a:prstGeom prst="rect">
-            <a:avLst/>
-          </a:prstGeom>
-          <a:noFill/>
-          <a:ln w="0">
-            <a:noFill/>
-          </a:ln>
-        </p:spPr>
-        <p:txBody>
-          <a:bodyPr wrap="none" lIns="90000" tIns="45000" rIns="90000" bIns="45000" anchor="t">
-            <a:spAutoFit/>
-          </a:bodyPr>
-          <a:lstStyle/>
-          <a:p>
-            <a:pPr algn="ctr"/>
-            <a:r>
-              <a:rPr lang="ru-RU" sz="2400" u="none" strike="noStrike" dirty="0">
-                <a:solidFill>
-                  <a:srgbClr val="000000"/>
-                </a:solidFill>
-                <a:effectLst/>
-                <a:uFillTx/>
-                <a:latin typeface="Noto Sans"/>
-              </a:rPr>
-              <a:t>Выбор нескольких физических величин</a:t>
-            </a:r>
-          </a:p>
-        </p:txBody>
-      </p:sp>
-      <p:sp>
-        <p:nvSpPr>
-          <p:cNvPr id="7" name="TextBox 2">
-            <a:extLst>
-              <a:ext uri="{FF2B5EF4-FFF2-40B4-BE49-F238E27FC236}">
-                <a16:creationId xmlns:a16="http://schemas.microsoft.com/office/drawing/2014/main" id="{61D4F05F-CDAA-4964-B096-96D46DE0682B}"/>
               </a:ext>
             </a:extLst>
           </p:cNvPr>
@@ -7043,7 +7043,7 @@
                 <a:uFillTx/>
                 <a:latin typeface="Segoe UI"/>
               </a:rPr>
-              <a:t>4</a:t>
+              <a:t>3</a:t>
             </a:r>
             <a:endParaRPr lang="ru-RU" sz="1800" b="0" u="none" strike="noStrike" dirty="0">
               <a:solidFill>
@@ -7219,7 +7219,7 @@
                 <a:uFillTx/>
                 <a:latin typeface="Segoe UI"/>
               </a:rPr>
-              <a:t>4</a:t>
+              <a:t>3</a:t>
             </a:r>
             <a:endParaRPr lang="ru-RU" sz="1800" b="0" u="none" strike="noStrike" dirty="0">
               <a:solidFill>
@@ -7522,7 +7522,7 @@
                 <a:uFillTx/>
                 <a:latin typeface="Segoe UI"/>
               </a:rPr>
-              <a:t>4</a:t>
+              <a:t>3</a:t>
             </a:r>
             <a:endParaRPr lang="ru-RU" sz="1800" b="0" u="none" strike="noStrike" dirty="0">
               <a:solidFill>
@@ -7916,7 +7916,7 @@
                 <a:uFillTx/>
                 <a:latin typeface="Segoe UI"/>
               </a:rPr>
-              <a:t>4</a:t>
+              <a:t>3</a:t>
             </a:r>
             <a:endParaRPr lang="ru-RU" sz="1800" b="0" u="none" strike="noStrike" dirty="0">
               <a:solidFill>
@@ -7925,6 +7925,281 @@
               <a:effectLst/>
               <a:uFillTx/>
               <a:latin typeface="Arial"/>
+            </a:endParaRPr>
+          </a:p>
+        </p:txBody>
+      </p:sp>
+      <p:sp>
+        <p:nvSpPr>
+          <p:cNvPr id="7" name="TextBox 6">
+            <a:extLst>
+              <a:ext uri="{FF2B5EF4-FFF2-40B4-BE49-F238E27FC236}">
+                <a16:creationId xmlns:a16="http://schemas.microsoft.com/office/drawing/2014/main" id="{A0BD71AA-CB25-4920-BB08-05A833E8EF18}"/>
+              </a:ext>
+            </a:extLst>
+          </p:cNvPr>
+          <p:cNvSpPr txBox="1"/>
+          <p:nvPr/>
+        </p:nvSpPr>
+        <p:spPr>
+          <a:xfrm>
+            <a:off x="729202" y="2023294"/>
+            <a:ext cx="10732994" cy="2811411"/>
+          </a:xfrm>
+          <a:prstGeom prst="rect">
+            <a:avLst/>
+          </a:prstGeom>
+          <a:noFill/>
+        </p:spPr>
+        <p:txBody>
+          <a:bodyPr wrap="square">
+            <a:spAutoFit/>
+          </a:bodyPr>
+          <a:lstStyle/>
+          <a:p>
+            <a:pPr marL="285840" indent="-285840" defTabSz="914400">
+              <a:lnSpc>
+                <a:spcPct val="150000"/>
+              </a:lnSpc>
+              <a:buClr>
+                <a:srgbClr val="000000"/>
+              </a:buClr>
+              <a:buFont typeface="Arial"/>
+              <a:buChar char="•"/>
+            </a:pPr>
+            <a:r>
+              <a:rPr lang="ru-RU" sz="2000" b="0" u="none" strike="noStrike" dirty="0">
+                <a:solidFill>
+                  <a:schemeClr val="dk1"/>
+                </a:solidFill>
+                <a:effectLst/>
+                <a:uFillTx/>
+                <a:latin typeface="+mj-lt"/>
+              </a:rPr>
+              <a:t>Произведение параметрического поиска					</a:t>
+            </a:r>
+            <a:r>
+              <a:rPr lang="ru-RU" sz="2000" b="0" i="0" dirty="0">
+                <a:effectLst/>
+                <a:latin typeface="YS Text"/>
+              </a:rPr>
+              <a:t>✅</a:t>
+            </a:r>
+            <a:endParaRPr lang="ru-RU" sz="2000" dirty="0">
+              <a:solidFill>
+                <a:srgbClr val="000000"/>
+              </a:solidFill>
+              <a:latin typeface="+mj-lt"/>
+            </a:endParaRPr>
+          </a:p>
+          <a:p>
+            <a:pPr marL="342900" indent="-342900">
+              <a:lnSpc>
+                <a:spcPct val="150000"/>
+              </a:lnSpc>
+              <a:buClr>
+                <a:srgbClr val="000000"/>
+              </a:buClr>
+              <a:buFont typeface="Arial" panose="020B0604020202020204" pitchFamily="34" charset="0"/>
+              <a:buChar char="•"/>
+            </a:pPr>
+            <a:r>
+              <a:rPr lang="ru-RU" sz="2000" b="0" u="none" strike="noStrike" dirty="0">
+                <a:solidFill>
+                  <a:schemeClr val="dk1"/>
+                </a:solidFill>
+                <a:effectLst/>
+                <a:uFillTx/>
+                <a:latin typeface="+mj-lt"/>
+              </a:rPr>
+              <a:t>Возможность выбора режима работы прибора (выдать/измерить)	</a:t>
+            </a:r>
+            <a:r>
+              <a:rPr lang="ru-RU" sz="2000" b="0" i="0" dirty="0">
+                <a:effectLst/>
+                <a:latin typeface="YS Text"/>
+              </a:rPr>
+              <a:t>✅</a:t>
+            </a:r>
+            <a:endParaRPr lang="ru-RU" sz="2000" b="0" u="none" strike="noStrike" dirty="0">
+              <a:solidFill>
+                <a:srgbClr val="000000"/>
+              </a:solidFill>
+              <a:effectLst/>
+              <a:uFillTx/>
+              <a:latin typeface="+mj-lt"/>
+            </a:endParaRPr>
+          </a:p>
+          <a:p>
+            <a:pPr marL="342900" indent="-342900">
+              <a:lnSpc>
+                <a:spcPct val="150000"/>
+              </a:lnSpc>
+              <a:buClr>
+                <a:srgbClr val="000000"/>
+              </a:buClr>
+              <a:buFont typeface="Arial" panose="020B0604020202020204" pitchFamily="34" charset="0"/>
+              <a:buChar char="•"/>
+            </a:pPr>
+            <a:r>
+              <a:rPr lang="ru-RU" sz="2000" b="0" u="none" strike="noStrike" dirty="0">
+                <a:solidFill>
+                  <a:schemeClr val="dk1"/>
+                </a:solidFill>
+                <a:effectLst/>
+                <a:uFillTx/>
+                <a:latin typeface="+mj-lt"/>
+              </a:rPr>
+              <a:t>Возможность указания погрешности					</a:t>
+            </a:r>
+            <a:r>
+              <a:rPr lang="ru-RU" sz="2000" b="0" i="0" dirty="0">
+                <a:effectLst/>
+                <a:latin typeface="YS Text"/>
+              </a:rPr>
+              <a:t>✅</a:t>
+            </a:r>
+            <a:endParaRPr lang="ru-RU" sz="2000" b="0" u="none" strike="noStrike" dirty="0">
+              <a:solidFill>
+                <a:srgbClr val="000000"/>
+              </a:solidFill>
+              <a:effectLst/>
+              <a:uFillTx/>
+              <a:latin typeface="+mj-lt"/>
+            </a:endParaRPr>
+          </a:p>
+          <a:p>
+            <a:pPr marL="342900" indent="-342900">
+              <a:lnSpc>
+                <a:spcPct val="150000"/>
+              </a:lnSpc>
+              <a:buClr>
+                <a:srgbClr val="000000"/>
+              </a:buClr>
+              <a:buFont typeface="Arial" panose="020B0604020202020204" pitchFamily="34" charset="0"/>
+              <a:buChar char="•"/>
+            </a:pPr>
+            <a:r>
+              <a:rPr lang="ru-RU" sz="2000" b="0" u="none" strike="noStrike" dirty="0">
+                <a:solidFill>
+                  <a:schemeClr val="dk1"/>
+                </a:solidFill>
+                <a:effectLst/>
+                <a:uFillTx/>
+                <a:latin typeface="+mj-lt"/>
+              </a:rPr>
+              <a:t>Возможность выбора нескольких физических величин			</a:t>
+            </a:r>
+            <a:r>
+              <a:rPr lang="ru-RU" sz="2000" b="0" i="0" dirty="0">
+                <a:effectLst/>
+                <a:latin typeface="YS Text"/>
+              </a:rPr>
+              <a:t>✅</a:t>
+            </a:r>
+            <a:endParaRPr lang="ru-RU" sz="2000" dirty="0">
+              <a:solidFill>
+                <a:srgbClr val="000000"/>
+              </a:solidFill>
+              <a:latin typeface="+mj-lt"/>
+            </a:endParaRPr>
+          </a:p>
+          <a:p>
+            <a:pPr marL="342900" indent="-342900">
+              <a:lnSpc>
+                <a:spcPct val="150000"/>
+              </a:lnSpc>
+              <a:buClr>
+                <a:srgbClr val="000000"/>
+              </a:buClr>
+              <a:buFont typeface="Arial" panose="020B0604020202020204" pitchFamily="34" charset="0"/>
+              <a:buChar char="•"/>
+            </a:pPr>
+            <a:r>
+              <a:rPr lang="ru-RU" sz="2000" b="0" u="none" strike="noStrike" dirty="0">
+                <a:solidFill>
+                  <a:schemeClr val="dk1"/>
+                </a:solidFill>
+                <a:effectLst/>
+                <a:uFillTx/>
+                <a:latin typeface="+mj-lt"/>
+              </a:rPr>
+              <a:t>Выдача дополнительных сведений о приборе				</a:t>
+            </a:r>
+            <a:r>
+              <a:rPr lang="ru-RU" sz="2000" b="0" i="0" dirty="0">
+                <a:effectLst/>
+                <a:latin typeface="YS Text"/>
+              </a:rPr>
+              <a:t>✅</a:t>
+            </a:r>
+            <a:endParaRPr lang="ru-RU" sz="2000" b="0" u="none" strike="noStrike" dirty="0">
+              <a:solidFill>
+                <a:srgbClr val="000000"/>
+              </a:solidFill>
+              <a:effectLst/>
+              <a:uFillTx/>
+              <a:latin typeface="+mj-lt"/>
+            </a:endParaRPr>
+          </a:p>
+          <a:p>
+            <a:pPr marL="285840" indent="-285840" defTabSz="914400">
+              <a:lnSpc>
+                <a:spcPct val="150000"/>
+              </a:lnSpc>
+              <a:buClr>
+                <a:srgbClr val="000000"/>
+              </a:buClr>
+              <a:buFont typeface="Arial"/>
+              <a:buChar char="•"/>
+            </a:pPr>
+            <a:r>
+              <a:rPr lang="ru-RU" sz="2000" b="0" u="none" strike="noStrike" dirty="0">
+                <a:solidFill>
+                  <a:schemeClr val="dk1"/>
+                </a:solidFill>
+                <a:effectLst/>
+                <a:uFillTx/>
+                <a:latin typeface="+mj-lt"/>
+              </a:rPr>
+              <a:t>Выдача </a:t>
+            </a:r>
+            <a:r>
+              <a:rPr lang="en-US" sz="2000" b="0" u="none" strike="noStrike" dirty="0">
+                <a:solidFill>
+                  <a:schemeClr val="dk1"/>
+                </a:solidFill>
+                <a:effectLst/>
+                <a:uFillTx/>
+                <a:latin typeface="+mj-lt"/>
+              </a:rPr>
+              <a:t>PDF-</a:t>
+            </a:r>
+            <a:r>
+              <a:rPr lang="ru-RU" sz="2000" b="0" u="none" strike="noStrike" dirty="0">
+                <a:solidFill>
+                  <a:schemeClr val="dk1"/>
+                </a:solidFill>
+                <a:effectLst/>
+                <a:uFillTx/>
+                <a:latin typeface="+mj-lt"/>
+              </a:rPr>
+              <a:t>документа соответствующего средства измерения		</a:t>
+            </a:r>
+            <a:r>
+              <a:rPr lang="ru-RU" sz="2000" b="0" i="0" dirty="0">
+                <a:effectLst/>
+                <a:latin typeface="YS Text"/>
+              </a:rPr>
+              <a:t>✅</a:t>
+            </a:r>
+            <a:endParaRPr lang="ru-RU" sz="2000" b="0" u="none" strike="noStrike" dirty="0">
+              <a:solidFill>
+                <a:srgbClr val="000000"/>
+              </a:solidFill>
+              <a:effectLst/>
+              <a:uFillTx/>
+              <a:latin typeface="+mj-lt"/>
             </a:endParaRPr>
           </a:p>
         </p:txBody>
@@ -8163,7 +8438,7 @@
                 <a:uFillTx/>
                 <a:latin typeface="Segoe UI"/>
               </a:rPr>
-              <a:t>4</a:t>
+              <a:t>3</a:t>
             </a:r>
             <a:endParaRPr lang="ru-RU" sz="1800" b="0" u="none" strike="noStrike" dirty="0">
               <a:solidFill>
@@ -8184,8 +8459,8 @@
         </p:nvSpPr>
         <p:spPr>
           <a:xfrm>
-            <a:off x="1263572" y="1436399"/>
-            <a:ext cx="9664254" cy="4465261"/>
+            <a:off x="1263572" y="2304365"/>
+            <a:ext cx="9664254" cy="2249270"/>
           </a:xfrm>
           <a:prstGeom prst="rect">
             <a:avLst/>
@@ -8242,92 +8517,7 @@
                 <a:ea typeface="Noto Sans" panose="020B0502040504020204" pitchFamily="34" charset="0"/>
                 <a:cs typeface="Noto Sans" panose="020B0502040504020204" pitchFamily="34" charset="0"/>
               </a:rPr>
-              <a:t>система:</a:t>
-            </a:r>
-          </a:p>
-          <a:p>
-            <a:pPr marL="742950" lvl="1" indent="-285750">
-              <a:lnSpc>
-                <a:spcPct val="150000"/>
-              </a:lnSpc>
-              <a:buFont typeface="Courier New" panose="02070309020205020404" pitchFamily="49" charset="0"/>
-              <a:buChar char="o"/>
-            </a:pPr>
-            <a:r>
-              <a:rPr lang="ru-RU" sz="2400" dirty="0">
-                <a:latin typeface="Noto Sans" panose="020B0502040504020204" pitchFamily="34" charset="0"/>
-                <a:ea typeface="Noto Sans" panose="020B0502040504020204" pitchFamily="34" charset="0"/>
-                <a:cs typeface="Noto Sans" panose="020B0502040504020204" pitchFamily="34" charset="0"/>
-              </a:rPr>
-              <a:t>Поиск приборов по внутренним файлам предприятия</a:t>
-            </a:r>
-          </a:p>
-          <a:p>
-            <a:pPr marL="742950" lvl="1" indent="-285750">
-              <a:lnSpc>
-                <a:spcPct val="150000"/>
-              </a:lnSpc>
-              <a:buFont typeface="Courier New" panose="02070309020205020404" pitchFamily="49" charset="0"/>
-              <a:buChar char="o"/>
-            </a:pPr>
-            <a:r>
-              <a:rPr lang="ru-RU" sz="2400" dirty="0">
-                <a:latin typeface="Noto Sans" panose="020B0502040504020204" pitchFamily="34" charset="0"/>
-                <a:ea typeface="Noto Sans" panose="020B0502040504020204" pitchFamily="34" charset="0"/>
-                <a:cs typeface="Noto Sans" panose="020B0502040504020204" pitchFamily="34" charset="0"/>
-              </a:rPr>
-              <a:t>Параметрический ввод запроса</a:t>
-            </a:r>
-          </a:p>
-          <a:p>
-            <a:pPr marL="742950" lvl="1" indent="-285750">
-              <a:lnSpc>
-                <a:spcPct val="150000"/>
-              </a:lnSpc>
-              <a:buFont typeface="Courier New" panose="02070309020205020404" pitchFamily="49" charset="0"/>
-              <a:buChar char="o"/>
-            </a:pPr>
-            <a:r>
-              <a:rPr lang="ru-RU" sz="2400" dirty="0">
-                <a:latin typeface="Noto Sans" panose="020B0502040504020204" pitchFamily="34" charset="0"/>
-                <a:ea typeface="Noto Sans" panose="020B0502040504020204" pitchFamily="34" charset="0"/>
-                <a:cs typeface="Noto Sans" panose="020B0502040504020204" pitchFamily="34" charset="0"/>
-              </a:rPr>
-              <a:t>Поддержка указания погрешности</a:t>
-            </a:r>
-          </a:p>
-          <a:p>
-            <a:pPr marL="742950" lvl="1" indent="-285750">
-              <a:lnSpc>
-                <a:spcPct val="150000"/>
-              </a:lnSpc>
-              <a:buFont typeface="Courier New" panose="02070309020205020404" pitchFamily="49" charset="0"/>
-              <a:buChar char="o"/>
-            </a:pPr>
-            <a:r>
-              <a:rPr lang="ru-RU" sz="2400" dirty="0">
-                <a:latin typeface="Noto Sans" panose="020B0502040504020204" pitchFamily="34" charset="0"/>
-                <a:ea typeface="Noto Sans" panose="020B0502040504020204" pitchFamily="34" charset="0"/>
-                <a:cs typeface="Noto Sans" panose="020B0502040504020204" pitchFamily="34" charset="0"/>
-              </a:rPr>
-              <a:t>Отображение дополнительной информации о приборах</a:t>
-            </a:r>
-          </a:p>
-          <a:p>
-            <a:pPr marL="742950" lvl="1" indent="-285750">
-              <a:lnSpc>
-                <a:spcPct val="150000"/>
-              </a:lnSpc>
-              <a:buFont typeface="Courier New" panose="02070309020205020404" pitchFamily="49" charset="0"/>
-              <a:buChar char="o"/>
-            </a:pPr>
-            <a:r>
-              <a:rPr lang="ru-RU" sz="2400" dirty="0">
-                <a:latin typeface="Noto Sans" panose="020B0502040504020204" pitchFamily="34" charset="0"/>
-                <a:ea typeface="Noto Sans" panose="020B0502040504020204" pitchFamily="34" charset="0"/>
-                <a:cs typeface="Noto Sans" panose="020B0502040504020204" pitchFamily="34" charset="0"/>
-              </a:rPr>
-              <a:t>Выдача ссылки  на исходный документ</a:t>
+              <a:t>система соответствующая выдвинутым требованиям метрологической службы</a:t>
             </a:r>
           </a:p>
           <a:p>
@@ -8647,7 +8837,7 @@
                 <a:uFillTx/>
                 <a:latin typeface="Segoe UI"/>
               </a:rPr>
-              <a:t>4</a:t>
+              <a:t>3</a:t>
             </a:r>
             <a:endParaRPr lang="ru-RU" sz="1800" b="0" u="none" strike="noStrike" dirty="0">
               <a:solidFill>
@@ -9650,7 +9840,7 @@
                 <a:uFillTx/>
                 <a:latin typeface="Segoe UI"/>
               </a:rPr>
-              <a:t>4</a:t>
+              <a:t>3</a:t>
             </a:r>
             <a:endParaRPr lang="ru-RU" sz="1800" b="0" u="none" strike="noStrike" dirty="0">
               <a:solidFill>
@@ -9892,7 +10082,7 @@
                 <a:uFillTx/>
                 <a:latin typeface="Segoe UI"/>
               </a:rPr>
-              <a:t>4</a:t>
+              <a:t>3</a:t>
             </a:r>
             <a:endParaRPr lang="ru-RU" sz="1800" b="0" u="none" strike="noStrike" dirty="0">
               <a:solidFill>
@@ -10417,7 +10607,7 @@
                 <a:uFillTx/>
                 <a:latin typeface="Segoe UI"/>
               </a:rPr>
-              <a:t>4</a:t>
+              <a:t>3</a:t>
             </a:r>
             <a:endParaRPr lang="ru-RU" sz="1800" b="0" u="none" strike="noStrike" dirty="0">
               <a:solidFill>
@@ -12301,7 +12491,7 @@
                 <a:uFillTx/>
                 <a:latin typeface="Segoe UI"/>
               </a:rPr>
-              <a:t>4</a:t>
+              <a:t>3</a:t>
             </a:r>
             <a:endParaRPr lang="ru-RU" sz="1800" b="0" u="none" strike="noStrike" dirty="0">
               <a:solidFill>
@@ -12574,7 +12764,7 @@
                 <a:uFillTx/>
                 <a:latin typeface="Segoe UI"/>
               </a:rPr>
-              <a:t>4</a:t>
+              <a:t>3</a:t>
             </a:r>
             <a:endParaRPr lang="ru-RU" sz="1800" b="0" u="none" strike="noStrike" dirty="0">
               <a:solidFill>
@@ -14264,7 +14454,7 @@
                 <a:uFillTx/>
                 <a:latin typeface="Segoe UI"/>
               </a:rPr>
-              <a:t>4</a:t>
+              <a:t>3</a:t>
             </a:r>
             <a:endParaRPr lang="ru-RU" sz="1800" b="0" u="none" strike="noStrike" dirty="0">
               <a:solidFill>
